--- a/GroundTruth/LaTeXtoOMML_GroundTruthA.pptx
+++ b/GroundTruth/LaTeXtoOMML_GroundTruthA.pptx
@@ -3475,56 +3475,259 @@
               </a:p>
               <a:p>
                 <a:pPr lvl="1"/>
-                <a14:m/>
-              </a:p>
-              <a:p>
-                <a:pPr lvl="1"/>
-              </a:p>
-              <a:p>
-                <a:pPr lvl="1"/>
-              </a:p>
-              <a:p>
-                <a:pPr lvl="1"/>
-              </a:p>
-              <a:p>
-                <a:pPr lvl="1"/>
+                <a14:m>
+                  <m:oMath xmlns:m="http://schemas.openxmlformats.org/officeDocument/2006/math">
+                    <m:sSup>
+                      <m:sSupPr>
+                        <m:ctrlPr>
+                          <a:rPr lang="en-US" i="1" dirty="0" smtClean="0">
+                            <a:latin typeface="Cambria Math" panose="02040503050406030204" pitchFamily="18" charset="0"/>
+                          </a:rPr>
+                        </m:ctrlPr>
+                      </m:sSupPr>
+                      <m:e>
+                        <m:r>
+                          <a:rPr lang="en-US" i="1" dirty="0" smtClean="0">
+                            <a:latin typeface="Cambria Math" panose="02040503050406030204" pitchFamily="18" charset="0"/>
+                          </a:rPr>
+                          <m:t>𝑎</m:t>
+                        </m:r>
+                      </m:e>
+                      <m:sup>
+                        <m:r>
+                          <a:rPr lang="en-US" i="1" dirty="0" smtClean="0">
+                            <a:latin typeface="Cambria Math" panose="02040503050406030204" pitchFamily="18" charset="0"/>
+                          </a:rPr>
+                          <m:t>2</m:t>
+                        </m:r>
+                      </m:sup>
+                    </m:sSup>
+                    <m:r>
+                      <a:rPr lang="en-US" i="1" dirty="0" smtClean="0">
+                        <a:latin typeface="Cambria Math" panose="02040503050406030204" pitchFamily="18" charset="0"/>
+                      </a:rPr>
+                      <m:t>+</m:t>
+                    </m:r>
+                    <m:sSup>
+                      <m:sSupPr>
+                        <m:ctrlPr>
+                          <a:rPr lang="en-US" i="1" dirty="0" smtClean="0">
+                            <a:latin typeface="Cambria Math" panose="02040503050406030204" pitchFamily="18" charset="0"/>
+                          </a:rPr>
+                        </m:ctrlPr>
+                      </m:sSupPr>
+                      <m:e>
+                        <m:r>
+                          <a:rPr lang="en-US" i="1" dirty="0" smtClean="0">
+                            <a:latin typeface="Cambria Math" panose="02040503050406030204" pitchFamily="18" charset="0"/>
+                          </a:rPr>
+                          <m:t>𝑏</m:t>
+                        </m:r>
+                      </m:e>
+                      <m:sup>
+                        <m:r>
+                          <a:rPr lang="en-US" i="1" dirty="0" smtClean="0">
+                            <a:latin typeface="Cambria Math" panose="02040503050406030204" pitchFamily="18" charset="0"/>
+                          </a:rPr>
+                          <m:t>2</m:t>
+                        </m:r>
+                      </m:sup>
+                    </m:sSup>
+                    <m:r>
+                      <a:rPr lang="en-US" i="1" dirty="0" smtClean="0">
+                        <a:latin typeface="Cambria Math" panose="02040503050406030204" pitchFamily="18" charset="0"/>
+                      </a:rPr>
+                      <m:t>=</m:t>
+                    </m:r>
+                    <m:sSup>
+                      <m:sSupPr>
+                        <m:ctrlPr>
+                          <a:rPr lang="en-US" i="1" dirty="0" smtClean="0">
+                            <a:latin typeface="Cambria Math" panose="02040503050406030204" pitchFamily="18" charset="0"/>
+                          </a:rPr>
+                        </m:ctrlPr>
+                      </m:sSupPr>
+                      <m:e>
+                        <m:r>
+                          <a:rPr lang="en-US" i="1" dirty="0" smtClean="0">
+                            <a:latin typeface="Cambria Math" panose="02040503050406030204" pitchFamily="18" charset="0"/>
+                          </a:rPr>
+                          <m:t>𝑐</m:t>
+                        </m:r>
+                      </m:e>
+                      <m:sup>
+                        <m:r>
+                          <a:rPr lang="en-US" i="1" dirty="0" smtClean="0">
+                            <a:latin typeface="Cambria Math" panose="02040503050406030204" pitchFamily="18" charset="0"/>
+                          </a:rPr>
+                          <m:t>2</m:t>
+                        </m:r>
+                      </m:sup>
+                    </m:sSup>
+                  </m:oMath>
+                </a14:m>
                 <a:endParaRPr lang="en-US" dirty="0"/>
               </a:p>
               <a:p>
                 <a:pPr lvl="1"/>
-                <a:endParaRPr lang="en-US" dirty="0"/>
-              </a:p>
-              <a:p>
-                <a:pPr marL="0" indent="0">
-                  <a:buNone/>
-                </a:pPr>
+                <a14:m>
+                  <m:oMath xmlns:m="http://schemas.openxmlformats.org/officeDocument/2006/math">
+                    <m:sSup>
+                      <m:sSupPr>
+                        <m:ctrlPr>
+                          <a:rPr lang="en-US" i="1" dirty="0" smtClean="0">
+                            <a:latin typeface="Cambria Math" panose="02040503050406030204" pitchFamily="18" charset="0"/>
+                          </a:rPr>
+                        </m:ctrlPr>
+                      </m:sSupPr>
+                      <m:e>
+                        <m:r>
+                          <a:rPr lang="en-US" i="1" dirty="0" smtClean="0">
+                            <a:latin typeface="Cambria Math" panose="02040503050406030204" pitchFamily="18" charset="0"/>
+                          </a:rPr>
+                          <m:t>3</m:t>
+                        </m:r>
+                      </m:e>
+                      <m:sup>
+                        <m:r>
+                          <a:rPr lang="en-US" i="1" dirty="0" smtClean="0">
+                            <a:latin typeface="Cambria Math" panose="02040503050406030204" pitchFamily="18" charset="0"/>
+                          </a:rPr>
+                          <m:t>2</m:t>
+                        </m:r>
+                      </m:sup>
+                    </m:sSup>
+                    <m:r>
+                      <a:rPr lang="en-US" i="1" dirty="0" smtClean="0">
+                        <a:latin typeface="Cambria Math" panose="02040503050406030204" pitchFamily="18" charset="0"/>
+                      </a:rPr>
+                      <m:t>+</m:t>
+                    </m:r>
+                    <m:sSup>
+                      <m:sSupPr>
+                        <m:ctrlPr>
+                          <a:rPr lang="en-US" i="1" dirty="0" smtClean="0">
+                            <a:latin typeface="Cambria Math" panose="02040503050406030204" pitchFamily="18" charset="0"/>
+                          </a:rPr>
+                        </m:ctrlPr>
+                      </m:sSupPr>
+                      <m:e>
+                        <m:r>
+                          <a:rPr lang="en-US" i="1" dirty="0" smtClean="0">
+                            <a:latin typeface="Cambria Math" panose="02040503050406030204" pitchFamily="18" charset="0"/>
+                          </a:rPr>
+                          <m:t>4</m:t>
+                        </m:r>
+                      </m:e>
+                      <m:sup>
+                        <m:r>
+                          <a:rPr lang="en-US" i="1" dirty="0" smtClean="0">
+                            <a:latin typeface="Cambria Math" panose="02040503050406030204" pitchFamily="18" charset="0"/>
+                          </a:rPr>
+                          <m:t>2</m:t>
+                        </m:r>
+                      </m:sup>
+                    </m:sSup>
+                    <m:r>
+                      <a:rPr lang="en-US" i="1" dirty="0" smtClean="0">
+                        <a:latin typeface="Cambria Math" panose="02040503050406030204" pitchFamily="18" charset="0"/>
+                      </a:rPr>
+                      <m:t>=</m:t>
+                    </m:r>
+                    <m:sSup>
+                      <m:sSupPr>
+                        <m:ctrlPr>
+                          <a:rPr lang="en-US" i="1" dirty="0" smtClean="0">
+                            <a:latin typeface="Cambria Math" panose="02040503050406030204" pitchFamily="18" charset="0"/>
+                          </a:rPr>
+                        </m:ctrlPr>
+                      </m:sSupPr>
+                      <m:e>
+                        <m:r>
+                          <a:rPr lang="en-US" i="1" dirty="0" smtClean="0">
+                            <a:latin typeface="Cambria Math" panose="02040503050406030204" pitchFamily="18" charset="0"/>
+                          </a:rPr>
+                          <m:t>5</m:t>
+                        </m:r>
+                      </m:e>
+                      <m:sup>
+                        <m:r>
+                          <a:rPr lang="en-US" i="1" dirty="0" smtClean="0">
+                            <a:latin typeface="Cambria Math" panose="02040503050406030204" pitchFamily="18" charset="0"/>
+                          </a:rPr>
+                          <m:t>2</m:t>
+                        </m:r>
+                      </m:sup>
+                    </m:sSup>
+                  </m:oMath>
+                </a14:m>
                 <a:endParaRPr lang="en-US" dirty="0"/>
               </a:p>
               <a:p>
                 <a:pPr lvl="1"/>
+                <a14:m>
+                  <m:oMath xmlns:m="http://schemas.openxmlformats.org/officeDocument/2006/math">
+                    <m:f>
+                      <m:fPr>
+                        <m:ctrlPr>
+                          <a:rPr lang="en-US" i="1" dirty="0" smtClean="0">
+                            <a:latin typeface="Cambria Math" panose="02040503050406030204" pitchFamily="18" charset="0"/>
+                          </a:rPr>
+                        </m:ctrlPr>
+                      </m:fPr>
+                      <m:num>
+                        <m:r>
+                          <a:rPr lang="en-US" i="1" dirty="0" smtClean="0">
+                            <a:latin typeface="Cambria Math" panose="02040503050406030204" pitchFamily="18" charset="0"/>
+                          </a:rPr>
+                          <m:t>1</m:t>
+                        </m:r>
+                      </m:num>
+                      <m:den>
+                        <m:r>
+                          <a:rPr lang="en-US" i="1" dirty="0" smtClean="0">
+                            <a:latin typeface="Cambria Math" panose="02040503050406030204" pitchFamily="18" charset="0"/>
+                          </a:rPr>
+                          <m:t>2</m:t>
+                        </m:r>
+                      </m:den>
+                    </m:f>
+                  </m:oMath>
+                </a14:m>
                 <a:endParaRPr lang="en-US" dirty="0"/>
               </a:p>
               <a:p>
                 <a:pPr lvl="1"/>
+                <a14:m>
+                  <m:oMath xmlns:m="http://schemas.openxmlformats.org/officeDocument/2006/math">
+                    <m:sSup>
+                      <m:sSupPr>
+                        <m:ctrlPr>
+                          <a:rPr lang="en-US" i="1" dirty="0" smtClean="0">
+                            <a:latin typeface="Cambria Math" panose="02040503050406030204" pitchFamily="18" charset="0"/>
+                          </a:rPr>
+                        </m:ctrlPr>
+                      </m:sSupPr>
+                      <m:e>
+                        <m:r>
+                          <a:rPr lang="en-US" i="1" dirty="0" smtClean="0">
+                            <a:latin typeface="Cambria Math" panose="02040503050406030204" pitchFamily="18" charset="0"/>
+                          </a:rPr>
+                          <m:t>𝛼</m:t>
+                        </m:r>
+                      </m:e>
+                      <m:sup>
+                        <m:r>
+                          <a:rPr lang="en-US" i="1" dirty="0" smtClean="0">
+                            <a:latin typeface="Cambria Math" panose="02040503050406030204" pitchFamily="18" charset="0"/>
+                          </a:rPr>
+                          <m:t>2</m:t>
+                        </m:r>
+                      </m:sup>
+                    </m:sSup>
+                  </m:oMath>
+                </a14:m>
                 <a:endParaRPr lang="en-US" dirty="0"/>
-              </a:p>
-              <a:p>
-                <a:pPr lvl="1"/>
-                <a:endParaRPr lang="en-US" dirty="0"/>
-              </a:p>
-              <a:p>
-                <a:pPr lvl="1"/>
-                <a:endParaRPr lang="en-US" dirty="0"/>
-              </a:p>
-              <a:p>
-                <a:pPr marL="457200" lvl="1" indent="0">
-                  <a:buNone/>
-                </a:pPr>
-                <a:endParaRPr dirty="0"/>
-              </a:p>
-              <a:p>
-                <a:pPr lvl="1"/>
-                <a:endParaRPr dirty="0"/>
               </a:p>
             </p:txBody>
           </p:sp>
@@ -3579,7 +3782,7 @@
         </p:blipFill>
         <p:spPr>
           <a:xfrm>
-            <a:off x="5443870" y="3753852"/>
+            <a:off x="5497032" y="2291129"/>
             <a:ext cx="2743200" cy="2367815"/>
           </a:xfrm>
           <a:prstGeom prst="rect">
